--- a/dist/초6/영어/의사소통/초6_영어_의사소통_02_제안하고답하기.pptx
+++ b/dist/초6/영어/의사소통/초6_영어_의사소통_02_제안하고답하기.pptx
@@ -121,13 +121,13 @@
   <p:extLst>
     <p:ext uri="{521415D9-36F7-43E2-AB2F-B90AF26B5E84}">
       <p14:sectionLst xmlns:p14="http://schemas.microsoft.com/office/powerpoint/2010/main">
-        <p14:section name="도입" id="{65aa501f-8dd1-21ac-0151-081ceeccb011}">
+        <p14:section name="도입" id="{3f743b9f-18ca-58ef-6bb7-87d7c3d4ca03}">
           <p14:sldIdLst>
             <p14:sldId id="256"/>
             <p14:sldId id="257"/>
           </p14:sldIdLst>
         </p14:section>
-        <p14:section name="개념" id="{b3a47467-1e76-871d-c17b-a34b47f155da}">
+        <p14:section name="개념" id="{90206849-9c9a-d691-5aea-f084aa18c876}">
           <p14:sldIdLst>
             <p14:sldId id="258"/>
             <p14:sldId id="259"/>
@@ -135,7 +135,7 @@
             <p14:sldId id="261"/>
           </p14:sldIdLst>
         </p14:section>
-        <p14:section name="연습" id="{97ec5a67-35bc-3337-2270-ff4ae69ab716}">
+        <p14:section name="연습" id="{45047623-b409-52bb-8da3-01aea4bc7abf}">
           <p14:sldIdLst>
             <p14:sldId id="262"/>
             <p14:sldId id="263"/>
@@ -143,19 +143,19 @@
             <p14:sldId id="265"/>
           </p14:sldIdLst>
         </p14:section>
-        <p14:section name="확인" id="{e965da9a-3a05-0f0e-2844-73459f9e0bae}">
+        <p14:section name="확인" id="{0025ef63-1920-bef3-f566-50f5fc14e89a}">
           <p14:sldIdLst>
             <p14:sldId id="266"/>
             <p14:sldId id="267"/>
             <p14:sldId id="268"/>
           </p14:sldIdLst>
         </p14:section>
-        <p14:section name="정리" id="{110fe103-7129-5478-eb91-c1e3309127b7}">
+        <p14:section name="정리" id="{7b43b938-b5ef-2bc0-7cdd-b4284f6c8a13}">
           <p14:sldIdLst>
             <p14:sldId id="269"/>
           </p14:sldIdLst>
         </p14:section>
-        <p14:section name="보충" id="{aa3e1cff-c982-a946-3eaf-d1f5847361c1}">
+        <p14:section name="보충" id="{83e6d34d-46cf-94c2-80b8-00a6e9cf0f25}">
           <p14:sldIdLst>
             <p14:sldId id="270"/>
           </p14:sldIdLst>
